--- a/docs/Jin_Yue_3036494489_Final_Defense_Clean_TNR.pptx
+++ b/docs/Jin_Yue_3036494489_Final_Defense_Clean_TNR.pptx
@@ -3805,7 +3805,7 @@
                 </a:solidFill>
                 <a:latin typeface="Times New Roman"/>
               </a:rPr>
-              <a:t>selected setting</a:t>
+              <a:t>65-q ELEC6081, cosine</a:t>
             </a:r>
           </a:p>
         </p:txBody>
@@ -3983,7 +3983,7 @@
                 </a:solidFill>
                 <a:latin typeface="Times New Roman"/>
               </a:rPr>
-              <a:t>selected setting</a:t>
+              <a:t>65-q ELEC6081, cosine</a:t>
             </a:r>
           </a:p>
         </p:txBody>
@@ -4245,7 +4245,7 @@
                 </a:solidFill>
                 <a:latin typeface="Times New Roman"/>
               </a:rPr>
-              <a:t>Finding</a:t>
+              <a:t>Finding (relative to alternatives on this set; not a global optimum claim)</a:t>
             </a:r>
           </a:p>
           <a:p>
@@ -4261,7 +4261,7 @@
                 </a:solidFill>
                 <a:latin typeface="Times New Roman"/>
               </a:rPr>
-              <a:t>• Raising only the top-hit threshold can remove fabrication but refuses too many legitimate questions.</a:t>
+              <a:t>• Raising only the top-hit threshold can cut fabrication but refuses many legitimate course questions.</a:t>
             </a:r>
           </a:p>
           <a:p>
@@ -4277,7 +4277,7 @@
                 </a:solidFill>
                 <a:latin typeface="Times New Roman"/>
               </a:rPr>
-              <a:t>• Requiring two passages to clear 0.62 keeps precision and recall high together.</a:t>
+              <a:t>• Requiring two passages to clear 0.62 yields high precision and recall together here (0.982 / 0.982).</a:t>
             </a:r>
           </a:p>
           <a:p>
@@ -4293,7 +4293,7 @@
                 </a:solidFill>
                 <a:latin typeface="Times New Roman"/>
               </a:rPr>
-              <a:t>• Selected thresholds are pinned by unit tests against high-precision-only alternatives.</a:t>
+              <a:t>• Selected thresholds are pinned by unit tests against a high-precision-only alternative.</a:t>
             </a:r>
           </a:p>
           <a:p>
@@ -4309,7 +4309,7 @@
                 </a:solidFill>
                 <a:latin typeface="Times New Roman"/>
               </a:rPr>
-              <a:t>• Fail-safe: weak / none routes to an explicitly labelled general-knowledge answer.</a:t>
+              <a:t>• Fail-safe: weak / none → explicitly labelled general-knowledge answer (not a silent course claim).</a:t>
             </a:r>
           </a:p>
         </p:txBody>
@@ -5098,7 +5098,7 @@
                 </a:solidFill>
                 <a:latin typeface="Times New Roman"/>
               </a:rPr>
-              <a:t>Δ = +0.233; improves on 7 of 10 questions.</a:t>
+              <a:t>Δ = +0.233 on mean context_precision; higher on 7 of 10 probe questions.</a:t>
             </a:r>
           </a:p>
           <a:p>
@@ -5114,7 +5114,7 @@
                 </a:solidFill>
                 <a:latin typeface="Times New Roman"/>
               </a:rPr>
-              <a:t>• Re-ranking demotes quiz/tutorial fragments that only share vocabulary (e.g. percentage tokens).</a:t>
+              <a:t>• Example effect: demotes quiz/tutorial fragments that mainly share surface vocabulary.</a:t>
             </a:r>
           </a:p>
           <a:p>
@@ -5130,7 +5130,7 @@
                 </a:solidFill>
                 <a:latin typeface="Times New Roman"/>
               </a:rPr>
-              <a:t>• Cross-encoder reads query and passage jointly — single-vector pre-query embeddings cannot.</a:t>
+              <a:t>• Cross-encoder scores query–passage pairs jointly; bi-encoder retrieval scores do not.</a:t>
             </a:r>
           </a:p>
           <a:p>
@@ -5146,7 +5146,7 @@
                 </a:solidFill>
                 <a:latin typeface="Times New Roman"/>
               </a:rPr>
-              <a:t>• Under the re-rank score scale, gate thresholds must be re-calibrated (H3 / scale discipline).</a:t>
+              <a:t>• Under the re-rank score scale, gate thresholds need re-calibration (H3 / scale discipline).</a:t>
             </a:r>
           </a:p>
         </p:txBody>
@@ -6309,7 +6309,7 @@
                 </a:solidFill>
                 <a:latin typeface="Times New Roman"/>
               </a:rPr>
-              <a:t>A deployable teacher–student co-learning bot over one shared course KB.</a:t>
+              <a:t>A working teacher–student co-learning bot over one shared course KB (single-course scope).</a:t>
             </a:r>
           </a:p>
         </p:txBody>
@@ -6467,7 +6467,7 @@
                 </a:solidFill>
                 <a:latin typeface="Times New Roman"/>
               </a:rPr>
-              <a:t>Hybrid retrieval + calibrated three-band gate + citation coverage repair.</a:t>
+              <a:t>Hybrid retrieval + CRAG-inspired three-band gate (corpus-calibrated) + citation coverage repair.</a:t>
             </a:r>
           </a:p>
         </p:txBody>
@@ -6625,7 +6625,7 @@
                 </a:solidFill>
                 <a:latin typeface="Times New Roman"/>
               </a:rPr>
-              <a:t>SOLO-informed practice and an export path that preserves privacy boundaries.</a:t>
+              <a:t>SOLO-informed practice; export limited to questions and scores (no full transcripts).</a:t>
             </a:r>
           </a:p>
         </p:txBody>
@@ -6783,7 +6783,7 @@
                 </a:solidFill>
                 <a:latin typeface="Times New Roman"/>
               </a:rPr>
-              <a:t>On ELEC6081: gate P/R ≈ 0.982; re-ranking lifts context precision by +0.233.</a:t>
+              <a:t>ELEC6081: gate P/R = 0.982 (65-q, cosine); context_precision +0.233 after re-rank (10-q probe).</a:t>
             </a:r>
           </a:p>
         </p:txBody>
@@ -9119,7 +9119,7 @@
                 </a:solidFill>
                 <a:latin typeface="Times New Roman"/>
               </a:rPr>
-              <a:t>Gate &amp; re-ranking evidence</a:t>
+              <a:t>Gate &amp; re-ranking on ELEC6081</a:t>
             </a:r>
           </a:p>
         </p:txBody>
@@ -9829,7 +9829,7 @@
                 </a:solidFill>
                 <a:latin typeface="Times New Roman"/>
               </a:rPr>
-              <a:t>Build a course-deployable HKU Teacher–Student Co-Learning (SOLO) Bot on retrieval-augmented generation.</a:t>
+              <a:t>Goal: a course-deployable Teacher–Student Co-Learning (SOLO) Bot using retrieval-augmented generation.</a:t>
             </a:r>
           </a:p>
         </p:txBody>
@@ -10249,7 +10249,7 @@
                 </a:solidFill>
                 <a:latin typeface="Times New Roman"/>
               </a:rPr>
-              <a:t>• Citations with file + page/slide</a:t>
+              <a:t>• Citations target file + page/slide when metadata allows</a:t>
             </a:r>
           </a:p>
         </p:txBody>
@@ -10459,7 +10459,7 @@
                 </a:solidFill>
                 <a:latin typeface="Times New Roman"/>
               </a:rPr>
-              <a:t>• No full conversation transcripts in export</a:t>
+              <a:t>• Export omits full conversation transcripts</a:t>
             </a:r>
           </a:p>
         </p:txBody>
@@ -10956,7 +10956,7 @@
                 </a:solidFill>
                 <a:latin typeface="Times New Roman"/>
               </a:rPr>
-              <a:t>General LLMs cannot sync with the latest slides, handouts, and course-specific materials.</a:t>
+              <a:t>General LLMs are not kept in sync with latest slides, handouts, and course-specific materials.</a:t>
             </a:r>
           </a:p>
         </p:txBody>
@@ -11312,7 +11312,7 @@
                 </a:solidFill>
                 <a:latin typeface="Times New Roman"/>
               </a:rPr>
-              <a:t>QA alone does not support practice, grading, and teacher feedback.</a:t>
+              <a:t>QA alone does not provide practice, grading, and teacher feedback.</a:t>
             </a:r>
           </a:p>
         </p:txBody>
@@ -11490,7 +11490,7 @@
                 </a:solidFill>
                 <a:latin typeface="Times New Roman"/>
               </a:rPr>
-              <a:t>PDFs, slides, tables, OCR pages, and bilingual terminology break naive pipelines.</a:t>
+              <a:t>PDFs, slides, tables, OCR pages, and bilingual terms often break naive pipelines.</a:t>
             </a:r>
           </a:p>
         </p:txBody>
@@ -12003,7 +12003,7 @@
                 </a:solidFill>
                 <a:latin typeface="Times New Roman"/>
               </a:rPr>
-              <a:t>• Compared with direct answering: better sync, traceability, lower hallucination risk</a:t>
+              <a:t>• Relative to direct answering: better material sync and traceability; can reduce unsupported claims</a:t>
             </a:r>
           </a:p>
         </p:txBody>
@@ -12126,7 +12126,7 @@
                 </a:solidFill>
                 <a:latin typeface="Times New Roman"/>
               </a:rPr>
-              <a:t>Trustworthy generation</a:t>
+              <a:t>Faithfulness constraints</a:t>
             </a:r>
           </a:p>
         </p:txBody>
@@ -12197,7 +12197,7 @@
                 </a:solidFill>
                 <a:latin typeface="Times New Roman"/>
               </a:rPr>
-              <a:t>• Citations must be enforced, not merely requested</a:t>
+              <a:t>• Citation checks should be enforced, not left to prompting alone</a:t>
             </a:r>
           </a:p>
         </p:txBody>
@@ -12585,7 +12585,7 @@
                 </a:solidFill>
                 <a:latin typeface="Times New Roman"/>
               </a:rPr>
-              <a:t>• Supports a closed loop beyond one-shot QA</a:t>
+              <a:t>• Supports practice beyond one-shot QA</a:t>
             </a:r>
           </a:p>
         </p:txBody>
@@ -12939,7 +12939,7 @@
                 </a:solidFill>
                 <a:latin typeface="Times New Roman"/>
               </a:rPr>
-              <a:t>Single-process FastAPI + static frontend; local embeddings/re-ranking; external LLM only for generation (qwen-plus).</a:t>
+              <a:t>Single-process FastAPI + static frontend; embeddings/re-ranking run locally; external LLM used for generation (qwen-plus).</a:t>
             </a:r>
           </a:p>
         </p:txBody>
@@ -15976,7 +15976,7 @@
                 </a:solidFill>
                 <a:latin typeface="Times New Roman"/>
               </a:rPr>
-              <a:t>Decision emphasises the second-ranked hit: course-covered questions usually have two strong passages; out-of-scope items often have one accidental hit then a drop.</a:t>
+              <a:t>CRAG-inspired gate. Decision emphasises the second-ranked hit: on this corpus, course-covered questions often have two strong passages; out-of-scope items often show one accidental hit then a drop.</a:t>
             </a:r>
           </a:p>
         </p:txBody>
@@ -16170,7 +16170,7 @@
                 </a:solidFill>
                 <a:latin typeface="Times New Roman"/>
               </a:rPr>
-              <a:t>(non-course)</a:t>
+              <a:t>(not a course conclusion)</a:t>
             </a:r>
           </a:p>
         </p:txBody>
@@ -16526,7 +16526,7 @@
                 </a:solidFill>
                 <a:latin typeface="Times New Roman"/>
               </a:rPr>
-              <a:t>Course-supported.</a:t>
+              <a:t>Treated as course-supported.</a:t>
             </a:r>
           </a:p>
           <a:p>
@@ -16642,7 +16642,7 @@
                 </a:solidFill>
                 <a:latin typeface="Times New Roman"/>
               </a:rPr>
-              <a:t>Selected cosine-regime thresholds (Table 5.3 / §8.5)</a:t>
+              <a:t>Cosine-regime thresholds calibrated on ELEC6081 (Table 5.3 / §8.5)</a:t>
             </a:r>
           </a:p>
           <a:p>
@@ -16674,7 +16674,7 @@
                 </a:solidFill>
                 <a:latin typeface="Times New Roman"/>
               </a:rPr>
-              <a:t>Re-ranking regime uses a separate threshold family (strong ≈ 0.80).</a:t>
+              <a:t>Re-ranking regime uses a separate threshold family (strong ≈ 0.80); not interchangeable.</a:t>
             </a:r>
           </a:p>
           <a:p>
@@ -16690,7 +16690,7 @@
                 </a:solidFill>
                 <a:latin typeface="Times New Roman"/>
               </a:rPr>
-              <a:t>Boundary weak cases: sufficiency judge on top-5; fail-safe if judge fails.</a:t>
+              <a:t>Boundary weak cases: optional sufficiency judge on top-5; labelled fallback if judge fails.</a:t>
             </a:r>
           </a:p>
         </p:txBody>
@@ -17429,7 +17429,7 @@
                 </a:solidFill>
                 <a:latin typeface="Times New Roman"/>
               </a:rPr>
-              <a:t>• Grounded precision / recall of the three-band gate</a:t>
+              <a:t>• Grounded precision / recall of the three-band gate (65 questions)</a:t>
             </a:r>
           </a:p>
           <a:p>
@@ -17445,7 +17445,7 @@
                 </a:solidFill>
                 <a:latin typeface="Times New Roman"/>
               </a:rPr>
-              <a:t>• Context precision under fusion-order vs re-ranking</a:t>
+              <a:t>• Context precision: fusion-order vs re-ranking (10-question probe)</a:t>
             </a:r>
           </a:p>
           <a:p>
@@ -17461,7 +17461,7 @@
                 </a:solidFill>
                 <a:latin typeface="Times New Roman"/>
               </a:rPr>
-              <a:t>• Ownership / export-boundary conformance (deterministic tests)</a:t>
+              <a:t>• Ownership / export-boundary checks (deterministic unit tests)</a:t>
             </a:r>
           </a:p>
           <a:p>
@@ -17477,7 +17477,7 @@
                 </a:solidFill>
                 <a:latin typeface="Times New Roman"/>
               </a:rPr>
-              <a:t>• Design goal: answer course questions; refuse non-course ones</a:t>
+              <a:t>• Design goal: answer when course-supported; otherwise label as general knowledge</a:t>
             </a:r>
           </a:p>
           <a:p>
@@ -17493,7 +17493,7 @@
                 </a:solidFill>
                 <a:latin typeface="Times New Roman"/>
               </a:rPr>
-              <a:t>• Thresholds are corpus-specific — not copied from public benchmarks</a:t>
+              <a:t>• Thresholds are corpus-specific — not transferred from public benchmarks</a:t>
             </a:r>
           </a:p>
           <a:p>
@@ -17509,7 +17509,7 @@
                 </a:solidFill>
                 <a:latin typeface="Times New Roman"/>
               </a:rPr>
-              <a:t>• On-topic and off-topic items are both required for gate value</a:t>
+              <a:t>• On-topic and off-topic items are both needed to assess the gate</a:t>
             </a:r>
           </a:p>
         </p:txBody>
